--- a/src/ppt-super/assets/tpl-03-tri-evolution/template.pptx
+++ b/src/ppt-super/assets/tpl-03-tri-evolution/template.pptx
@@ -3136,7 +3136,14 @@
           <a:bodyPr rtlCol="0" anchor="ctr"/>
           <a:lstStyle/>
           <a:p>
-            <a:pPr algn="ctr"/>
+            <a:pPr algn="ctr">
+              <a:spcBef>
+                <a:spcPts val="0"/>
+              </a:spcBef>
+              <a:spcAft>
+                <a:spcPts val="0"/>
+              </a:spcAft>
+            </a:pPr>
           </a:p>
         </p:txBody>
       </p:sp>
@@ -3166,14 +3173,21 @@
               <a:lnSpc>
                 <a:spcPct val="112000"/>
               </a:lnSpc>
+              <a:spcBef>
+                <a:spcPts val="0"/>
+              </a:spcBef>
+              <a:spcAft>
+                <a:spcPts val="0"/>
+              </a:spcAft>
             </a:pPr>
             <a:r>
-              <a:rPr sz="1400" b="1" i="0">
+              <a:rPr sz="1400" b="1" i="0" lang="zh-CN" altLang="zh-CN">
                 <a:solidFill>
                   <a:srgbClr val="FFFFFF"/>
                 </a:solidFill>
                 <a:latin typeface="Microsoft YaHei"/>
                 <a:ea typeface="Microsoft YaHei"/>
+                <a:cs typeface="Microsoft YaHei"/>
               </a:rPr>
               <a:t>智能体演进</a:t>
             </a:r>
@@ -3206,14 +3220,21 @@
               <a:lnSpc>
                 <a:spcPct val="112000"/>
               </a:lnSpc>
+              <a:spcBef>
+                <a:spcPts val="0"/>
+              </a:spcBef>
+              <a:spcAft>
+                <a:spcPts val="0"/>
+              </a:spcAft>
             </a:pPr>
             <a:r>
-              <a:rPr sz="2200" b="1" i="0">
+              <a:rPr sz="2200" b="1" i="0" lang="zh-CN" altLang="zh-CN">
                 <a:solidFill>
                   <a:srgbClr val="B90A0A"/>
                 </a:solidFill>
                 <a:latin typeface="Microsoft YaHei"/>
                 <a:ea typeface="Microsoft YaHei"/>
+                <a:cs typeface="Microsoft YaHei"/>
               </a:rPr>
               <a:t>研发智能化三代演进: 工具→助手→智能体, 人均效能提升 5 倍</a:t>
             </a:r>
@@ -3300,7 +3321,14 @@
           <a:bodyPr rtlCol="0" anchor="ctr"/>
           <a:lstStyle/>
           <a:p>
-            <a:pPr algn="ctr"/>
+            <a:pPr algn="ctr">
+              <a:spcBef>
+                <a:spcPts val="0"/>
+              </a:spcBef>
+              <a:spcAft>
+                <a:spcPts val="0"/>
+              </a:spcAft>
+            </a:pPr>
           </a:p>
         </p:txBody>
       </p:sp>
@@ -3344,7 +3372,14 @@
           <a:bodyPr rtlCol="0" anchor="ctr"/>
           <a:lstStyle/>
           <a:p>
-            <a:pPr algn="ctr"/>
+            <a:pPr algn="ctr">
+              <a:spcBef>
+                <a:spcPts val="0"/>
+              </a:spcBef>
+              <a:spcAft>
+                <a:spcPts val="0"/>
+              </a:spcAft>
+            </a:pPr>
           </a:p>
         </p:txBody>
       </p:sp>
@@ -3374,14 +3409,21 @@
               <a:lnSpc>
                 <a:spcPct val="112000"/>
               </a:lnSpc>
+              <a:spcBef>
+                <a:spcPts val="0"/>
+              </a:spcBef>
+              <a:spcAft>
+                <a:spcPts val="0"/>
+              </a:spcAft>
             </a:pPr>
             <a:r>
-              <a:rPr sz="1600" b="1" i="0">
+              <a:rPr sz="1600" b="1" i="0" lang="zh-CN" altLang="zh-CN">
                 <a:solidFill>
                   <a:srgbClr val="FFFFFF"/>
                 </a:solidFill>
                 <a:latin typeface="Microsoft YaHei"/>
                 <a:ea typeface="Microsoft YaHei"/>
+                <a:cs typeface="Microsoft YaHei"/>
               </a:rPr>
               <a:t>第一代 · 工具 (2020-2022)</a:t>
             </a:r>
@@ -3428,7 +3470,14 @@
           <a:bodyPr rtlCol="0" anchor="ctr"/>
           <a:lstStyle/>
           <a:p>
-            <a:pPr algn="ctr"/>
+            <a:pPr algn="ctr">
+              <a:spcBef>
+                <a:spcPts val="0"/>
+              </a:spcBef>
+              <a:spcAft>
+                <a:spcPts val="0"/>
+              </a:spcAft>
+            </a:pPr>
           </a:p>
         </p:txBody>
       </p:sp>
@@ -3458,14 +3507,21 @@
               <a:lnSpc>
                 <a:spcPct val="112000"/>
               </a:lnSpc>
+              <a:spcBef>
+                <a:spcPts val="0"/>
+              </a:spcBef>
+              <a:spcAft>
+                <a:spcPts val="0"/>
+              </a:spcAft>
             </a:pPr>
             <a:r>
-              <a:rPr sz="1100" b="0" i="0">
+              <a:rPr sz="1100" b="0" i="0" lang="zh-CN" altLang="zh-CN">
                 <a:solidFill>
                   <a:srgbClr val="595959"/>
                 </a:solidFill>
                 <a:latin typeface="Microsoft YaHei"/>
                 <a:ea typeface="Microsoft YaHei"/>
+                <a:cs typeface="Microsoft YaHei"/>
               </a:rPr>
               <a:t>被动响应式单点提效: 开发者全程主导, 工具按指令完成单一任务</a:t>
             </a:r>
@@ -3480,8 +3536,8 @@
         </p:nvSpPr>
         <p:spPr>
           <a:xfrm>
-            <a:off x="3314700" y="1402484"/>
-            <a:ext cx="292100" cy="292100"/>
+            <a:off x="3239262" y="1308377"/>
+            <a:ext cx="442976" cy="480314"/>
           </a:xfrm>
           <a:prstGeom prst="rect">
             <a:avLst/>
@@ -3498,14 +3554,21 @@
               <a:lnSpc>
                 <a:spcPct val="112000"/>
               </a:lnSpc>
+              <a:spcBef>
+                <a:spcPts val="0"/>
+              </a:spcBef>
+              <a:spcAft>
+                <a:spcPts val="0"/>
+              </a:spcAft>
             </a:pPr>
             <a:r>
-              <a:rPr sz="2900" b="1" i="0">
+              <a:rPr sz="2900" b="1" i="0" lang="zh-CN" altLang="zh-CN">
                 <a:solidFill>
                   <a:srgbClr val="1F4E79"/>
                 </a:solidFill>
                 <a:latin typeface="Microsoft YaHei"/>
                 <a:ea typeface="Microsoft YaHei"/>
+                <a:cs typeface="Microsoft YaHei"/>
               </a:rPr>
               <a:t>⚙</a:t>
             </a:r>
@@ -3574,14 +3637,21 @@
               <a:lnSpc>
                 <a:spcPct val="130000"/>
               </a:lnSpc>
+              <a:spcBef>
+                <a:spcPts val="0"/>
+              </a:spcBef>
+              <a:spcAft>
+                <a:spcPts val="0"/>
+              </a:spcAft>
             </a:pPr>
             <a:r>
-              <a:rPr sz="1150" b="0" i="0">
+              <a:rPr sz="1150" b="0" i="0" lang="zh-CN" altLang="zh-CN">
                 <a:solidFill>
                   <a:srgbClr val="262626"/>
                 </a:solidFill>
                 <a:latin typeface="Microsoft YaHei"/>
                 <a:ea typeface="Microsoft YaHei"/>
+                <a:cs typeface="Microsoft YaHei"/>
               </a:rPr>
               <a:t>第一代工具以代码补全、语法检查等单点能力为主, 无上下文记忆, 每次使用均从零开始, 提效局限于编码单一环节, 约 15%。由于仅做模式匹配而不理解业务意图, 规则库维护成本高且更新滞后, 覆盖语言与框架有限、长尾场景基本缺位, 产出质量完全依赖开发者自行把关。</a:t>
             </a:r>
@@ -3630,7 +3700,14 @@
           <a:bodyPr rtlCol="0" anchor="ctr"/>
           <a:lstStyle/>
           <a:p>
-            <a:pPr algn="ctr"/>
+            <a:pPr algn="ctr">
+              <a:spcBef>
+                <a:spcPts val="0"/>
+              </a:spcBef>
+              <a:spcAft>
+                <a:spcPts val="0"/>
+              </a:spcAft>
+            </a:pPr>
           </a:p>
         </p:txBody>
       </p:sp>
@@ -3660,14 +3737,21 @@
               <a:lnSpc>
                 <a:spcPct val="112000"/>
               </a:lnSpc>
+              <a:spcBef>
+                <a:spcPts val="0"/>
+              </a:spcBef>
+              <a:spcAft>
+                <a:spcPts val="0"/>
+              </a:spcAft>
             </a:pPr>
             <a:r>
-              <a:rPr sz="1050" b="1" i="0">
+              <a:rPr sz="1050" b="1" i="0" lang="zh-CN" altLang="zh-CN">
                 <a:solidFill>
                   <a:srgbClr val="1F4E79"/>
                 </a:solidFill>
                 <a:latin typeface="Microsoft YaHei"/>
                 <a:ea typeface="Microsoft YaHei"/>
+                <a:cs typeface="Microsoft YaHei"/>
               </a:rPr>
               <a:t>人下指令</a:t>
             </a:r>
@@ -3753,7 +3837,14 @@
           <a:bodyPr rtlCol="0" anchor="ctr"/>
           <a:lstStyle/>
           <a:p>
-            <a:pPr algn="ctr"/>
+            <a:pPr algn="ctr">
+              <a:spcBef>
+                <a:spcPts val="0"/>
+              </a:spcBef>
+              <a:spcAft>
+                <a:spcPts val="0"/>
+              </a:spcAft>
+            </a:pPr>
           </a:p>
         </p:txBody>
       </p:sp>
@@ -3783,14 +3874,21 @@
               <a:lnSpc>
                 <a:spcPct val="112000"/>
               </a:lnSpc>
+              <a:spcBef>
+                <a:spcPts val="0"/>
+              </a:spcBef>
+              <a:spcAft>
+                <a:spcPts val="0"/>
+              </a:spcAft>
             </a:pPr>
             <a:r>
-              <a:rPr sz="1050" b="1" i="0">
+              <a:rPr sz="1050" b="1" i="0" lang="zh-CN" altLang="zh-CN">
                 <a:solidFill>
                   <a:srgbClr val="1F4E79"/>
                 </a:solidFill>
                 <a:latin typeface="Microsoft YaHei"/>
                 <a:ea typeface="Microsoft YaHei"/>
+                <a:cs typeface="Microsoft YaHei"/>
               </a:rPr>
               <a:t>工具执行</a:t>
             </a:r>
@@ -3876,7 +3974,14 @@
           <a:bodyPr rtlCol="0" anchor="ctr"/>
           <a:lstStyle/>
           <a:p>
-            <a:pPr algn="ctr"/>
+            <a:pPr algn="ctr">
+              <a:spcBef>
+                <a:spcPts val="0"/>
+              </a:spcBef>
+              <a:spcAft>
+                <a:spcPts val="0"/>
+              </a:spcAft>
+            </a:pPr>
           </a:p>
         </p:txBody>
       </p:sp>
@@ -3906,14 +4011,21 @@
               <a:lnSpc>
                 <a:spcPct val="112000"/>
               </a:lnSpc>
+              <a:spcBef>
+                <a:spcPts val="0"/>
+              </a:spcBef>
+              <a:spcAft>
+                <a:spcPts val="0"/>
+              </a:spcAft>
             </a:pPr>
             <a:r>
-              <a:rPr sz="1050" b="1" i="0">
+              <a:rPr sz="1050" b="1" i="0" lang="zh-CN" altLang="zh-CN">
                 <a:solidFill>
                   <a:srgbClr val="1F4E79"/>
                 </a:solidFill>
                 <a:latin typeface="Microsoft YaHei"/>
                 <a:ea typeface="Microsoft YaHei"/>
+                <a:cs typeface="Microsoft YaHei"/>
               </a:rPr>
               <a:t>人工检查</a:t>
             </a:r>
@@ -3928,8 +4040,8 @@
         </p:nvSpPr>
         <p:spPr>
           <a:xfrm>
-            <a:off x="533400" y="4038600"/>
-            <a:ext cx="3124200" cy="330200"/>
+            <a:off x="533400" y="4019867"/>
+            <a:ext cx="3124200" cy="367665"/>
           </a:xfrm>
           <a:prstGeom prst="rect">
             <a:avLst/>
@@ -3946,14 +4058,21 @@
               <a:lnSpc>
                 <a:spcPct val="112000"/>
               </a:lnSpc>
+              <a:spcBef>
+                <a:spcPts val="0"/>
+              </a:spcBef>
+              <a:spcAft>
+                <a:spcPts val="0"/>
+              </a:spcAft>
             </a:pPr>
             <a:r>
-              <a:rPr sz="1050" b="0" i="0">
+              <a:rPr sz="1050" b="0" i="0" lang="zh-CN" altLang="zh-CN">
                 <a:solidFill>
                   <a:srgbClr val="595959"/>
                 </a:solidFill>
                 <a:latin typeface="Microsoft YaHei"/>
                 <a:ea typeface="Microsoft YaHei"/>
+                <a:cs typeface="Microsoft YaHei"/>
               </a:rPr>
               <a:t>典型实践: IDE 插件式补全与静态检查, 仅覆盖编码单环节</a:t>
             </a:r>
@@ -4000,7 +4119,14 @@
           <a:bodyPr rtlCol="0" anchor="ctr"/>
           <a:lstStyle/>
           <a:p>
-            <a:pPr algn="ctr"/>
+            <a:pPr algn="ctr">
+              <a:spcBef>
+                <a:spcPts val="0"/>
+              </a:spcBef>
+              <a:spcAft>
+                <a:spcPts val="0"/>
+              </a:spcAft>
+            </a:pPr>
           </a:p>
         </p:txBody>
       </p:sp>
@@ -4030,14 +4156,21 @@
               <a:lnSpc>
                 <a:spcPct val="112000"/>
               </a:lnSpc>
+              <a:spcBef>
+                <a:spcPts val="0"/>
+              </a:spcBef>
+              <a:spcAft>
+                <a:spcPts val="0"/>
+              </a:spcAft>
             </a:pPr>
             <a:r>
-              <a:rPr sz="1250" b="1" i="0">
+              <a:rPr sz="1250" b="1" i="0" lang="zh-CN" altLang="zh-CN">
                 <a:solidFill>
                   <a:srgbClr val="1F4E79"/>
                 </a:solidFill>
                 <a:latin typeface="Microsoft YaHei"/>
                 <a:ea typeface="Microsoft YaHei"/>
+                <a:cs typeface="Microsoft YaHei"/>
               </a:rPr>
               <a:t>能力等级 L1 · 被动执行</a:t>
             </a:r>
@@ -4086,7 +4219,14 @@
           <a:bodyPr rtlCol="0" anchor="ctr"/>
           <a:lstStyle/>
           <a:p>
-            <a:pPr algn="ctr"/>
+            <a:pPr algn="ctr">
+              <a:spcBef>
+                <a:spcPts val="0"/>
+              </a:spcBef>
+              <a:spcAft>
+                <a:spcPts val="0"/>
+              </a:spcAft>
+            </a:pPr>
           </a:p>
         </p:txBody>
       </p:sp>
@@ -4130,7 +4270,14 @@
           <a:bodyPr rtlCol="0" anchor="ctr"/>
           <a:lstStyle/>
           <a:p>
-            <a:pPr algn="ctr"/>
+            <a:pPr algn="ctr">
+              <a:spcBef>
+                <a:spcPts val="0"/>
+              </a:spcBef>
+              <a:spcAft>
+                <a:spcPts val="0"/>
+              </a:spcAft>
+            </a:pPr>
           </a:p>
         </p:txBody>
       </p:sp>
@@ -4160,14 +4307,21 @@
               <a:lnSpc>
                 <a:spcPct val="112000"/>
               </a:lnSpc>
+              <a:spcBef>
+                <a:spcPts val="0"/>
+              </a:spcBef>
+              <a:spcAft>
+                <a:spcPts val="0"/>
+              </a:spcAft>
             </a:pPr>
             <a:r>
-              <a:rPr sz="1600" b="1" i="0">
+              <a:rPr sz="1600" b="1" i="0" lang="zh-CN" altLang="zh-CN">
                 <a:solidFill>
                   <a:srgbClr val="FFFFFF"/>
                 </a:solidFill>
                 <a:latin typeface="Microsoft YaHei"/>
                 <a:ea typeface="Microsoft YaHei"/>
+                <a:cs typeface="Microsoft YaHei"/>
               </a:rPr>
               <a:t>第二代 · 助手 (2023-2024)</a:t>
             </a:r>
@@ -4214,7 +4368,14 @@
           <a:bodyPr rtlCol="0" anchor="ctr"/>
           <a:lstStyle/>
           <a:p>
-            <a:pPr algn="ctr"/>
+            <a:pPr algn="ctr">
+              <a:spcBef>
+                <a:spcPts val="0"/>
+              </a:spcBef>
+              <a:spcAft>
+                <a:spcPts val="0"/>
+              </a:spcAft>
+            </a:pPr>
           </a:p>
         </p:txBody>
       </p:sp>
@@ -4244,14 +4405,21 @@
               <a:lnSpc>
                 <a:spcPct val="112000"/>
               </a:lnSpc>
+              <a:spcBef>
+                <a:spcPts val="0"/>
+              </a:spcBef>
+              <a:spcAft>
+                <a:spcPts val="0"/>
+              </a:spcAft>
             </a:pPr>
             <a:r>
-              <a:rPr sz="1100" b="0" i="0">
+              <a:rPr sz="1100" b="0" i="0" lang="zh-CN" altLang="zh-CN">
                 <a:solidFill>
                   <a:srgbClr val="595959"/>
                 </a:solidFill>
                 <a:latin typeface="Microsoft YaHei"/>
                 <a:ea typeface="Microsoft YaHei"/>
+                <a:cs typeface="Microsoft YaHei"/>
               </a:rPr>
               <a:t>多轮对话人机结对: 理解工程上下文, 主动建议但人做决策</a:t>
             </a:r>
@@ -4300,7 +4468,14 @@
           <a:bodyPr rtlCol="0" anchor="ctr"/>
           <a:lstStyle/>
           <a:p>
-            <a:pPr algn="ctr"/>
+            <a:pPr algn="ctr">
+              <a:spcBef>
+                <a:spcPts val="0"/>
+              </a:spcBef>
+              <a:spcAft>
+                <a:spcPts val="0"/>
+              </a:spcAft>
+            </a:pPr>
           </a:p>
         </p:txBody>
       </p:sp>
@@ -4349,7 +4524,14 @@
           <a:bodyPr rtlCol="0" anchor="ctr"/>
           <a:lstStyle/>
           <a:p>
-            <a:pPr algn="ctr"/>
+            <a:pPr algn="ctr">
+              <a:spcBef>
+                <a:spcPts val="0"/>
+              </a:spcBef>
+              <a:spcAft>
+                <a:spcPts val="0"/>
+              </a:spcAft>
+            </a:pPr>
           </a:p>
         </p:txBody>
       </p:sp>
@@ -4415,14 +4597,21 @@
               <a:lnSpc>
                 <a:spcPct val="130000"/>
               </a:lnSpc>
+              <a:spcBef>
+                <a:spcPts val="0"/>
+              </a:spcBef>
+              <a:spcAft>
+                <a:spcPts val="0"/>
+              </a:spcAft>
             </a:pPr>
             <a:r>
-              <a:rPr sz="1150" b="0" i="0">
+              <a:rPr sz="1150" b="0" i="0" lang="zh-CN" altLang="zh-CN">
                 <a:solidFill>
                   <a:srgbClr val="262626"/>
                 </a:solidFill>
                 <a:latin typeface="Microsoft YaHei"/>
                 <a:ea typeface="Microsoft YaHei"/>
+                <a:cs typeface="Microsoft YaHei"/>
               </a:rPr>
               <a:t>第二代助手具备跨文件上下文理解能力, 可主动给出重构建议, 覆盖需求、代码、用例多个环节, 人机结对使编码效率提升约 40%。但决策与验证仍依赖工程师, 对话式交互的意图澄清成本较高, 复杂任务需人工拆解后再分派, 同时受知识截止局限, 需要检索增强持续补盲。</a:t>
             </a:r>
@@ -4471,7 +4660,14 @@
           <a:bodyPr rtlCol="0" anchor="ctr"/>
           <a:lstStyle/>
           <a:p>
-            <a:pPr algn="ctr"/>
+            <a:pPr algn="ctr">
+              <a:spcBef>
+                <a:spcPts val="0"/>
+              </a:spcBef>
+              <a:spcAft>
+                <a:spcPts val="0"/>
+              </a:spcAft>
+            </a:pPr>
           </a:p>
         </p:txBody>
       </p:sp>
@@ -4501,14 +4697,21 @@
               <a:lnSpc>
                 <a:spcPct val="112000"/>
               </a:lnSpc>
+              <a:spcBef>
+                <a:spcPts val="0"/>
+              </a:spcBef>
+              <a:spcAft>
+                <a:spcPts val="0"/>
+              </a:spcAft>
             </a:pPr>
             <a:r>
-              <a:rPr sz="1050" b="1" i="0">
+              <a:rPr sz="1050" b="1" i="0" lang="zh-CN" altLang="zh-CN">
                 <a:solidFill>
                   <a:srgbClr val="1F4E79"/>
                 </a:solidFill>
                 <a:latin typeface="Microsoft YaHei"/>
                 <a:ea typeface="Microsoft YaHei"/>
+                <a:cs typeface="Microsoft YaHei"/>
               </a:rPr>
               <a:t>人提需求</a:t>
             </a:r>
@@ -4594,7 +4797,14 @@
           <a:bodyPr rtlCol="0" anchor="ctr"/>
           <a:lstStyle/>
           <a:p>
-            <a:pPr algn="ctr"/>
+            <a:pPr algn="ctr">
+              <a:spcBef>
+                <a:spcPts val="0"/>
+              </a:spcBef>
+              <a:spcAft>
+                <a:spcPts val="0"/>
+              </a:spcAft>
+            </a:pPr>
           </a:p>
         </p:txBody>
       </p:sp>
@@ -4624,14 +4834,21 @@
               <a:lnSpc>
                 <a:spcPct val="112000"/>
               </a:lnSpc>
+              <a:spcBef>
+                <a:spcPts val="0"/>
+              </a:spcBef>
+              <a:spcAft>
+                <a:spcPts val="0"/>
+              </a:spcAft>
             </a:pPr>
             <a:r>
-              <a:rPr sz="1050" b="1" i="0">
+              <a:rPr sz="1050" b="1" i="0" lang="zh-CN" altLang="zh-CN">
                 <a:solidFill>
                   <a:srgbClr val="1F4E79"/>
                 </a:solidFill>
                 <a:latin typeface="Microsoft YaHei"/>
                 <a:ea typeface="Microsoft YaHei"/>
+                <a:cs typeface="Microsoft YaHei"/>
               </a:rPr>
               <a:t>AI 建议</a:t>
             </a:r>
@@ -4717,7 +4934,14 @@
           <a:bodyPr rtlCol="0" anchor="ctr"/>
           <a:lstStyle/>
           <a:p>
-            <a:pPr algn="ctr"/>
+            <a:pPr algn="ctr">
+              <a:spcBef>
+                <a:spcPts val="0"/>
+              </a:spcBef>
+              <a:spcAft>
+                <a:spcPts val="0"/>
+              </a:spcAft>
+            </a:pPr>
           </a:p>
         </p:txBody>
       </p:sp>
@@ -4747,14 +4971,21 @@
               <a:lnSpc>
                 <a:spcPct val="112000"/>
               </a:lnSpc>
+              <a:spcBef>
+                <a:spcPts val="0"/>
+              </a:spcBef>
+              <a:spcAft>
+                <a:spcPts val="0"/>
+              </a:spcAft>
             </a:pPr>
             <a:r>
-              <a:rPr sz="1050" b="1" i="0">
+              <a:rPr sz="1050" b="1" i="0" lang="zh-CN" altLang="zh-CN">
                 <a:solidFill>
                   <a:srgbClr val="1F4E79"/>
                 </a:solidFill>
                 <a:latin typeface="Microsoft YaHei"/>
                 <a:ea typeface="Microsoft YaHei"/>
+                <a:cs typeface="Microsoft YaHei"/>
               </a:rPr>
               <a:t>人做决策</a:t>
             </a:r>
@@ -4769,8 +5000,8 @@
         </p:nvSpPr>
         <p:spPr>
           <a:xfrm>
-            <a:off x="4533900" y="4038600"/>
-            <a:ext cx="3124200" cy="330200"/>
+            <a:off x="4533900" y="4019867"/>
+            <a:ext cx="3124200" cy="367665"/>
           </a:xfrm>
           <a:prstGeom prst="rect">
             <a:avLst/>
@@ -4787,14 +5018,21 @@
               <a:lnSpc>
                 <a:spcPct val="112000"/>
               </a:lnSpc>
+              <a:spcBef>
+                <a:spcPts val="0"/>
+              </a:spcBef>
+              <a:spcAft>
+                <a:spcPts val="0"/>
+              </a:spcAft>
             </a:pPr>
             <a:r>
-              <a:rPr sz="1050" b="0" i="0">
+              <a:rPr sz="1050" b="0" i="0" lang="zh-CN" altLang="zh-CN">
                 <a:solidFill>
                   <a:srgbClr val="595959"/>
                 </a:solidFill>
                 <a:latin typeface="Microsoft YaHei"/>
                 <a:ea typeface="Microsoft YaHei"/>
+                <a:cs typeface="Microsoft YaHei"/>
               </a:rPr>
               <a:t>典型实践: 对话式结对编程, 需求到用例多环节人机协作</a:t>
             </a:r>
@@ -4841,7 +5079,14 @@
           <a:bodyPr rtlCol="0" anchor="ctr"/>
           <a:lstStyle/>
           <a:p>
-            <a:pPr algn="ctr"/>
+            <a:pPr algn="ctr">
+              <a:spcBef>
+                <a:spcPts val="0"/>
+              </a:spcBef>
+              <a:spcAft>
+                <a:spcPts val="0"/>
+              </a:spcAft>
+            </a:pPr>
           </a:p>
         </p:txBody>
       </p:sp>
@@ -4871,14 +5116,21 @@
               <a:lnSpc>
                 <a:spcPct val="112000"/>
               </a:lnSpc>
+              <a:spcBef>
+                <a:spcPts val="0"/>
+              </a:spcBef>
+              <a:spcAft>
+                <a:spcPts val="0"/>
+              </a:spcAft>
             </a:pPr>
             <a:r>
-              <a:rPr sz="1250" b="1" i="0">
+              <a:rPr sz="1250" b="1" i="0" lang="zh-CN" altLang="zh-CN">
                 <a:solidFill>
                   <a:srgbClr val="1F4E79"/>
                 </a:solidFill>
                 <a:latin typeface="Microsoft YaHei"/>
                 <a:ea typeface="Microsoft YaHei"/>
+                <a:cs typeface="Microsoft YaHei"/>
               </a:rPr>
               <a:t>能力等级 L2-L3 · 人机协同</a:t>
             </a:r>
@@ -4927,7 +5179,14 @@
           <a:bodyPr rtlCol="0" anchor="ctr"/>
           <a:lstStyle/>
           <a:p>
-            <a:pPr algn="ctr"/>
+            <a:pPr algn="ctr">
+              <a:spcBef>
+                <a:spcPts val="0"/>
+              </a:spcBef>
+              <a:spcAft>
+                <a:spcPts val="0"/>
+              </a:spcAft>
+            </a:pPr>
           </a:p>
         </p:txBody>
       </p:sp>
@@ -4971,7 +5230,14 @@
           <a:bodyPr rtlCol="0" anchor="ctr"/>
           <a:lstStyle/>
           <a:p>
-            <a:pPr algn="ctr"/>
+            <a:pPr algn="ctr">
+              <a:spcBef>
+                <a:spcPts val="0"/>
+              </a:spcBef>
+              <a:spcAft>
+                <a:spcPts val="0"/>
+              </a:spcAft>
+            </a:pPr>
           </a:p>
         </p:txBody>
       </p:sp>
@@ -5001,14 +5267,21 @@
               <a:lnSpc>
                 <a:spcPct val="112000"/>
               </a:lnSpc>
+              <a:spcBef>
+                <a:spcPts val="0"/>
+              </a:spcBef>
+              <a:spcAft>
+                <a:spcPts val="0"/>
+              </a:spcAft>
             </a:pPr>
             <a:r>
-              <a:rPr sz="1600" b="1" i="0">
+              <a:rPr sz="1600" b="1" i="0" lang="zh-CN" altLang="zh-CN">
                 <a:solidFill>
                   <a:srgbClr val="FFFFFF"/>
                 </a:solidFill>
                 <a:latin typeface="Microsoft YaHei"/>
                 <a:ea typeface="Microsoft YaHei"/>
+                <a:cs typeface="Microsoft YaHei"/>
               </a:rPr>
               <a:t>第三代 · 智能体 (2025- )</a:t>
             </a:r>
@@ -5055,7 +5328,14 @@
           <a:bodyPr rtlCol="0" anchor="ctr"/>
           <a:lstStyle/>
           <a:p>
-            <a:pPr algn="ctr"/>
+            <a:pPr algn="ctr">
+              <a:spcBef>
+                <a:spcPts val="0"/>
+              </a:spcBef>
+              <a:spcAft>
+                <a:spcPts val="0"/>
+              </a:spcAft>
+            </a:pPr>
           </a:p>
         </p:txBody>
       </p:sp>
@@ -5085,14 +5365,21 @@
               <a:lnSpc>
                 <a:spcPct val="112000"/>
               </a:lnSpc>
+              <a:spcBef>
+                <a:spcPts val="0"/>
+              </a:spcBef>
+              <a:spcAft>
+                <a:spcPts val="0"/>
+              </a:spcAft>
             </a:pPr>
             <a:r>
-              <a:rPr sz="1100" b="0" i="0">
+              <a:rPr sz="1100" b="0" i="0" lang="zh-CN" altLang="zh-CN">
                 <a:solidFill>
                   <a:srgbClr val="595959"/>
                 </a:solidFill>
                 <a:latin typeface="Microsoft YaHei"/>
                 <a:ea typeface="Microsoft YaHei"/>
+                <a:cs typeface="Microsoft YaHei"/>
               </a:rPr>
               <a:t>目标驱动自主闭环: 自主规划-执行-验证-修复, 人只看结果</a:t>
             </a:r>
@@ -5107,8 +5394,8 @@
         </p:nvSpPr>
         <p:spPr>
           <a:xfrm>
-            <a:off x="11315700" y="1409122"/>
-            <a:ext cx="292100" cy="292100"/>
+            <a:off x="11179175" y="1338700"/>
+            <a:ext cx="565150" cy="432943"/>
           </a:xfrm>
           <a:prstGeom prst="rect">
             <a:avLst/>
@@ -5125,14 +5412,21 @@
               <a:lnSpc>
                 <a:spcPct val="112000"/>
               </a:lnSpc>
+              <a:spcBef>
+                <a:spcPts val="0"/>
+              </a:spcBef>
+              <a:spcAft>
+                <a:spcPts val="0"/>
+              </a:spcAft>
             </a:pPr>
             <a:r>
-              <a:rPr sz="2600" b="1" i="0">
+              <a:rPr sz="2600" b="1" i="0" lang="zh-CN" altLang="zh-CN">
                 <a:solidFill>
                   <a:srgbClr val="B90A0A"/>
                 </a:solidFill>
                 <a:latin typeface="Microsoft YaHei"/>
                 <a:ea typeface="Microsoft YaHei"/>
+                <a:cs typeface="Microsoft YaHei"/>
               </a:rPr>
               <a:t>⚡</a:t>
             </a:r>
@@ -5201,14 +5495,21 @@
               <a:lnSpc>
                 <a:spcPct val="130000"/>
               </a:lnSpc>
+              <a:spcBef>
+                <a:spcPts val="0"/>
+              </a:spcBef>
+              <a:spcAft>
+                <a:spcPts val="0"/>
+              </a:spcAft>
             </a:pPr>
             <a:r>
-              <a:rPr sz="1150" b="0" i="0">
+              <a:rPr sz="1150" b="0" i="0" lang="zh-CN" altLang="zh-CN">
                 <a:solidFill>
                   <a:srgbClr val="262626"/>
                 </a:solidFill>
                 <a:latin typeface="Microsoft YaHei"/>
                 <a:ea typeface="Microsoft YaHei"/>
+                <a:cs typeface="Microsoft YaHei"/>
               </a:rPr>
               <a:t>第三代智能体实现任务级自主规划与工具编排, 依托执行-验证-修复闭环完成自我纠错, 多智能体协同可端到端交付完整特性, 人均效能提升 5 倍。长任务支持持续运行与断点自动续作, 安全围栏与审计日志保障全程可追溯, 人的角色随之从执行者转向架构评审与指挥官。</a:t>
             </a:r>
@@ -5257,7 +5558,14 @@
           <a:bodyPr rtlCol="0" anchor="ctr"/>
           <a:lstStyle/>
           <a:p>
-            <a:pPr algn="ctr"/>
+            <a:pPr algn="ctr">
+              <a:spcBef>
+                <a:spcPts val="0"/>
+              </a:spcBef>
+              <a:spcAft>
+                <a:spcPts val="0"/>
+              </a:spcAft>
+            </a:pPr>
           </a:p>
         </p:txBody>
       </p:sp>
@@ -5287,14 +5595,21 @@
               <a:lnSpc>
                 <a:spcPct val="112000"/>
               </a:lnSpc>
+              <a:spcBef>
+                <a:spcPts val="0"/>
+              </a:spcBef>
+              <a:spcAft>
+                <a:spcPts val="0"/>
+              </a:spcAft>
             </a:pPr>
             <a:r>
-              <a:rPr sz="1050" b="1" i="0">
+              <a:rPr sz="1050" b="1" i="0" lang="zh-CN" altLang="zh-CN">
                 <a:solidFill>
                   <a:srgbClr val="B90A0A"/>
                 </a:solidFill>
                 <a:latin typeface="Microsoft YaHei"/>
                 <a:ea typeface="Microsoft YaHei"/>
+                <a:cs typeface="Microsoft YaHei"/>
               </a:rPr>
               <a:t>人定目标</a:t>
             </a:r>
@@ -5380,7 +5695,14 @@
           <a:bodyPr rtlCol="0" anchor="ctr"/>
           <a:lstStyle/>
           <a:p>
-            <a:pPr algn="ctr"/>
+            <a:pPr algn="ctr">
+              <a:spcBef>
+                <a:spcPts val="0"/>
+              </a:spcBef>
+              <a:spcAft>
+                <a:spcPts val="0"/>
+              </a:spcAft>
+            </a:pPr>
           </a:p>
         </p:txBody>
       </p:sp>
@@ -5410,14 +5732,21 @@
               <a:lnSpc>
                 <a:spcPct val="112000"/>
               </a:lnSpc>
+              <a:spcBef>
+                <a:spcPts val="0"/>
+              </a:spcBef>
+              <a:spcAft>
+                <a:spcPts val="0"/>
+              </a:spcAft>
             </a:pPr>
             <a:r>
-              <a:rPr sz="1050" b="1" i="0">
+              <a:rPr sz="1050" b="1" i="0" lang="zh-CN" altLang="zh-CN">
                 <a:solidFill>
                   <a:srgbClr val="B90A0A"/>
                 </a:solidFill>
                 <a:latin typeface="Microsoft YaHei"/>
                 <a:ea typeface="Microsoft YaHei"/>
+                <a:cs typeface="Microsoft YaHei"/>
               </a:rPr>
               <a:t>智能体闭环</a:t>
             </a:r>
@@ -5503,7 +5832,14 @@
           <a:bodyPr rtlCol="0" anchor="ctr"/>
           <a:lstStyle/>
           <a:p>
-            <a:pPr algn="ctr"/>
+            <a:pPr algn="ctr">
+              <a:spcBef>
+                <a:spcPts val="0"/>
+              </a:spcBef>
+              <a:spcAft>
+                <a:spcPts val="0"/>
+              </a:spcAft>
+            </a:pPr>
           </a:p>
         </p:txBody>
       </p:sp>
@@ -5533,14 +5869,21 @@
               <a:lnSpc>
                 <a:spcPct val="112000"/>
               </a:lnSpc>
+              <a:spcBef>
+                <a:spcPts val="0"/>
+              </a:spcBef>
+              <a:spcAft>
+                <a:spcPts val="0"/>
+              </a:spcAft>
             </a:pPr>
             <a:r>
-              <a:rPr sz="1050" b="1" i="0">
+              <a:rPr sz="1050" b="1" i="0" lang="zh-CN" altLang="zh-CN">
                 <a:solidFill>
                   <a:srgbClr val="B90A0A"/>
                 </a:solidFill>
                 <a:latin typeface="Microsoft YaHei"/>
                 <a:ea typeface="Microsoft YaHei"/>
+                <a:cs typeface="Microsoft YaHei"/>
               </a:rPr>
               <a:t>人验收</a:t>
             </a:r>
@@ -5555,8 +5898,8 @@
         </p:nvSpPr>
         <p:spPr>
           <a:xfrm>
-            <a:off x="8534400" y="4038600"/>
-            <a:ext cx="3124200" cy="330200"/>
+            <a:off x="8534400" y="4019867"/>
+            <a:ext cx="3124200" cy="367665"/>
           </a:xfrm>
           <a:prstGeom prst="rect">
             <a:avLst/>
@@ -5573,14 +5916,21 @@
               <a:lnSpc>
                 <a:spcPct val="112000"/>
               </a:lnSpc>
+              <a:spcBef>
+                <a:spcPts val="0"/>
+              </a:spcBef>
+              <a:spcAft>
+                <a:spcPts val="0"/>
+              </a:spcAft>
             </a:pPr>
             <a:r>
-              <a:rPr sz="1050" b="0" i="0">
+              <a:rPr sz="1050" b="0" i="0" lang="zh-CN" altLang="zh-CN">
                 <a:solidFill>
                   <a:srgbClr val="595959"/>
                 </a:solidFill>
                 <a:latin typeface="Microsoft YaHei"/>
                 <a:ea typeface="Microsoft YaHei"/>
+                <a:cs typeface="Microsoft YaHei"/>
               </a:rPr>
               <a:t>典型实践: 特性级端到端交付, 人只评审架构与验收结果</a:t>
             </a:r>
@@ -5627,7 +5977,14 @@
           <a:bodyPr rtlCol="0" anchor="ctr"/>
           <a:lstStyle/>
           <a:p>
-            <a:pPr algn="ctr"/>
+            <a:pPr algn="ctr">
+              <a:spcBef>
+                <a:spcPts val="0"/>
+              </a:spcBef>
+              <a:spcAft>
+                <a:spcPts val="0"/>
+              </a:spcAft>
+            </a:pPr>
           </a:p>
         </p:txBody>
       </p:sp>
@@ -5657,14 +6014,21 @@
               <a:lnSpc>
                 <a:spcPct val="112000"/>
               </a:lnSpc>
+              <a:spcBef>
+                <a:spcPts val="0"/>
+              </a:spcBef>
+              <a:spcAft>
+                <a:spcPts val="0"/>
+              </a:spcAft>
             </a:pPr>
             <a:r>
-              <a:rPr sz="1250" b="1" i="0">
+              <a:rPr sz="1250" b="1" i="0" lang="zh-CN" altLang="zh-CN">
                 <a:solidFill>
                   <a:srgbClr val="B90A0A"/>
                 </a:solidFill>
                 <a:latin typeface="Microsoft YaHei"/>
                 <a:ea typeface="Microsoft YaHei"/>
+                <a:cs typeface="Microsoft YaHei"/>
               </a:rPr>
               <a:t>能力等级 L4 · 自主闭环</a:t>
             </a:r>
@@ -5711,7 +6075,14 @@
           <a:bodyPr rtlCol="0" anchor="ctr"/>
           <a:lstStyle/>
           <a:p>
-            <a:pPr algn="ctr"/>
+            <a:pPr algn="ctr">
+              <a:spcBef>
+                <a:spcPts val="0"/>
+              </a:spcBef>
+              <a:spcAft>
+                <a:spcPts val="0"/>
+              </a:spcAft>
+            </a:pPr>
           </a:p>
         </p:txBody>
       </p:sp>
@@ -5755,7 +6126,14 @@
           <a:bodyPr rtlCol="0" anchor="ctr"/>
           <a:lstStyle/>
           <a:p>
-            <a:pPr algn="ctr"/>
+            <a:pPr algn="ctr">
+              <a:spcBef>
+                <a:spcPts val="0"/>
+              </a:spcBef>
+              <a:spcAft>
+                <a:spcPts val="0"/>
+              </a:spcAft>
+            </a:pPr>
           </a:p>
         </p:txBody>
       </p:sp>
@@ -5799,7 +6177,14 @@
           <a:bodyPr rtlCol="0" anchor="ctr"/>
           <a:lstStyle/>
           <a:p>
-            <a:pPr algn="ctr"/>
+            <a:pPr algn="ctr">
+              <a:spcBef>
+                <a:spcPts val="0"/>
+              </a:spcBef>
+              <a:spcAft>
+                <a:spcPts val="0"/>
+              </a:spcAft>
+            </a:pPr>
           </a:p>
         </p:txBody>
       </p:sp>
@@ -5843,7 +6228,14 @@
           <a:bodyPr rtlCol="0" anchor="ctr"/>
           <a:lstStyle/>
           <a:p>
-            <a:pPr algn="ctr"/>
+            <a:pPr algn="ctr">
+              <a:spcBef>
+                <a:spcPts val="0"/>
+              </a:spcBef>
+              <a:spcAft>
+                <a:spcPts val="0"/>
+              </a:spcAft>
+            </a:pPr>
           </a:p>
         </p:txBody>
       </p:sp>
@@ -5873,14 +6265,21 @@
               <a:lnSpc>
                 <a:spcPct val="112000"/>
               </a:lnSpc>
+              <a:spcBef>
+                <a:spcPts val="0"/>
+              </a:spcBef>
+              <a:spcAft>
+                <a:spcPts val="0"/>
+              </a:spcAft>
             </a:pPr>
             <a:r>
-              <a:rPr sz="1300" b="1" i="0">
+              <a:rPr sz="1300" b="1" i="0" lang="zh-CN" altLang="zh-CN">
                 <a:solidFill>
                   <a:srgbClr val="B90A0A"/>
                 </a:solidFill>
                 <a:latin typeface="Microsoft YaHei"/>
                 <a:ea typeface="Microsoft YaHei"/>
+                <a:cs typeface="Microsoft YaHei"/>
               </a:rPr>
               <a:t>演进主线</a:t>
             </a:r>
@@ -5913,14 +6312,21 @@
               <a:lnSpc>
                 <a:spcPct val="112000"/>
               </a:lnSpc>
+              <a:spcBef>
+                <a:spcPts val="0"/>
+              </a:spcBef>
+              <a:spcAft>
+                <a:spcPts val="0"/>
+              </a:spcAft>
             </a:pPr>
             <a:r>
-              <a:rPr sz="1400" b="1" i="0">
+              <a:rPr sz="1400" b="1" i="0" lang="zh-CN" altLang="zh-CN">
                 <a:solidFill>
                   <a:srgbClr val="1F4E79"/>
                 </a:solidFill>
                 <a:latin typeface="Microsoft YaHei"/>
                 <a:ea typeface="Microsoft YaHei"/>
+                <a:cs typeface="Microsoft YaHei"/>
               </a:rPr>
               <a:t>人的角色从“操作者”→“协作者”→“指挥官”, 智能体时代研发组织与流程须同步重构</a:t>
             </a:r>
@@ -6005,7 +6411,14 @@
           <a:bodyPr rtlCol="0" anchor="ctr"/>
           <a:lstStyle/>
           <a:p>
-            <a:pPr algn="ctr"/>
+            <a:pPr algn="ctr">
+              <a:spcBef>
+                <a:spcPts val="0"/>
+              </a:spcBef>
+              <a:spcAft>
+                <a:spcPts val="0"/>
+              </a:spcAft>
+            </a:pPr>
           </a:p>
         </p:txBody>
       </p:sp>
@@ -6035,14 +6448,21 @@
               <a:lnSpc>
                 <a:spcPct val="112000"/>
               </a:lnSpc>
+              <a:spcBef>
+                <a:spcPts val="0"/>
+              </a:spcBef>
+              <a:spcAft>
+                <a:spcPts val="0"/>
+              </a:spcAft>
             </a:pPr>
             <a:r>
-              <a:rPr sz="950" b="0" i="0">
+              <a:rPr sz="950" b="0" i="0" lang="zh-CN" altLang="zh-CN">
                 <a:solidFill>
                   <a:srgbClr val="595959"/>
                 </a:solidFill>
                 <a:latin typeface="Microsoft YaHei"/>
                 <a:ea typeface="Microsoft YaHei"/>
+                <a:cs typeface="Microsoft YaHei"/>
               </a:rPr>
               <a:t>工具元年 2020</a:t>
             </a:r>
@@ -6089,7 +6509,14 @@
           <a:bodyPr rtlCol="0" anchor="ctr"/>
           <a:lstStyle/>
           <a:p>
-            <a:pPr algn="ctr"/>
+            <a:pPr algn="ctr">
+              <a:spcBef>
+                <a:spcPts val="0"/>
+              </a:spcBef>
+              <a:spcAft>
+                <a:spcPts val="0"/>
+              </a:spcAft>
+            </a:pPr>
           </a:p>
         </p:txBody>
       </p:sp>
@@ -6119,14 +6546,21 @@
               <a:lnSpc>
                 <a:spcPct val="112000"/>
               </a:lnSpc>
+              <a:spcBef>
+                <a:spcPts val="0"/>
+              </a:spcBef>
+              <a:spcAft>
+                <a:spcPts val="0"/>
+              </a:spcAft>
             </a:pPr>
             <a:r>
-              <a:rPr sz="950" b="0" i="0">
+              <a:rPr sz="950" b="0" i="0" lang="zh-CN" altLang="zh-CN">
                 <a:solidFill>
                   <a:srgbClr val="595959"/>
                 </a:solidFill>
                 <a:latin typeface="Microsoft YaHei"/>
                 <a:ea typeface="Microsoft YaHei"/>
+                <a:cs typeface="Microsoft YaHei"/>
               </a:rPr>
               <a:t>助手普及 2023</a:t>
             </a:r>
@@ -6173,7 +6607,14 @@
           <a:bodyPr rtlCol="0" anchor="ctr"/>
           <a:lstStyle/>
           <a:p>
-            <a:pPr algn="ctr"/>
+            <a:pPr algn="ctr">
+              <a:spcBef>
+                <a:spcPts val="0"/>
+              </a:spcBef>
+              <a:spcAft>
+                <a:spcPts val="0"/>
+              </a:spcAft>
+            </a:pPr>
           </a:p>
         </p:txBody>
       </p:sp>
@@ -6203,14 +6644,21 @@
               <a:lnSpc>
                 <a:spcPct val="112000"/>
               </a:lnSpc>
+              <a:spcBef>
+                <a:spcPts val="0"/>
+              </a:spcBef>
+              <a:spcAft>
+                <a:spcPts val="0"/>
+              </a:spcAft>
             </a:pPr>
             <a:r>
-              <a:rPr sz="950" b="0" i="0">
+              <a:rPr sz="950" b="0" i="0" lang="zh-CN" altLang="zh-CN">
                 <a:solidFill>
                   <a:srgbClr val="595959"/>
                 </a:solidFill>
                 <a:latin typeface="Microsoft YaHei"/>
                 <a:ea typeface="Microsoft YaHei"/>
+                <a:cs typeface="Microsoft YaHei"/>
               </a:rPr>
               <a:t>智能体爆发 2026</a:t>
             </a:r>
@@ -6257,7 +6705,14 @@
           <a:bodyPr rtlCol="0" anchor="ctr"/>
           <a:lstStyle/>
           <a:p>
-            <a:pPr algn="ctr"/>
+            <a:pPr algn="ctr">
+              <a:spcBef>
+                <a:spcPts val="0"/>
+              </a:spcBef>
+              <a:spcAft>
+                <a:spcPts val="0"/>
+              </a:spcAft>
+            </a:pPr>
           </a:p>
         </p:txBody>
       </p:sp>
@@ -6287,14 +6742,21 @@
               <a:lnSpc>
                 <a:spcPct val="112000"/>
               </a:lnSpc>
+              <a:spcBef>
+                <a:spcPts val="0"/>
+              </a:spcBef>
+              <a:spcAft>
+                <a:spcPts val="0"/>
+              </a:spcAft>
             </a:pPr>
             <a:r>
-              <a:rPr sz="1500" b="1" i="0">
+              <a:rPr sz="1500" b="1" i="0" lang="zh-CN" altLang="zh-CN">
                 <a:solidFill>
                   <a:srgbClr val="262626"/>
                 </a:solidFill>
                 <a:latin typeface="Microsoft YaHei"/>
                 <a:ea typeface="Microsoft YaHei"/>
+                <a:cs typeface="Microsoft YaHei"/>
               </a:rPr>
               <a:t>人均效能 ×5</a:t>
             </a:r>
